--- a/output/wordlabs-tele-3day.pptx
+++ b/output/wordlabs-tele-3day.pptx
@@ -6071,7 +6071,7 @@
                 <a:ea typeface="Calibri" pitchFamily="34" charset="-122"/>
                 <a:cs typeface="Calibri" pitchFamily="34" charset="-120"/>
               </a:rPr>
-              <a:t> to call her grandmother, then watched a </a:t>
+              <a:t> and called her grandmother, who watched the </a:t>
             </a:r>
             <a:pPr algn="l" indent="0" marL="0">
               <a:buNone/>
@@ -6102,7 +6102,7 @@
                 <a:ea typeface="Calibri" pitchFamily="34" charset="-122"/>
                 <a:cs typeface="Calibri" pitchFamily="34" charset="-120"/>
               </a:rPr>
-              <a:t> of the school concert.</a:t>
+              <a:t> from home.</a:t>
             </a:r>
             <a:endParaRPr lang="en-US" sz="1800" dirty="0"/>
           </a:p>
@@ -12690,7 +12690,7 @@
                 <a:ea typeface="Calibri" pitchFamily="34" charset="-122"/>
                 <a:cs typeface="Calibri" pitchFamily="34" charset="-120"/>
               </a:rPr>
-              <a:t>to throw or send out</a:t>
+              <a:t>to send or throw out</a:t>
             </a:r>
             <a:endParaRPr lang="en-US" sz="850" dirty="0"/>
           </a:p>
@@ -13675,7 +13675,7 @@
                 <a:ea typeface="Calibri" pitchFamily="34" charset="-122"/>
                 <a:cs typeface="Calibri" pitchFamily="34" charset="-120"/>
               </a:rPr>
-              <a:t>to throw or send out</a:t>
+              <a:t>to send or throw out</a:t>
             </a:r>
             <a:endParaRPr lang="en-US" sz="850" dirty="0"/>
           </a:p>
@@ -15162,7 +15162,7 @@
                 <a:ea typeface="Calibri" pitchFamily="34" charset="-122"/>
                 <a:cs typeface="Calibri" pitchFamily="34" charset="-120"/>
               </a:rPr>
-              <a:t>to throw or send out</a:t>
+              <a:t>to send or throw out</a:t>
             </a:r>
             <a:endParaRPr lang="en-US" sz="850" dirty="0"/>
           </a:p>
@@ -17509,7 +17509,7 @@
                 <a:ea typeface="Calibri" pitchFamily="34" charset="-122"/>
                 <a:cs typeface="Calibri" pitchFamily="34" charset="-120"/>
               </a:rPr>
-              <a:t>, the scientist studied distant planets, recorded data with a </a:t>
+              <a:t>, the scientist sent a </a:t>
             </a:r>
             <a:pPr algn="l" indent="0" marL="0">
               <a:buNone/>
@@ -17526,7 +17526,7 @@
                 <a:ea typeface="Calibri" pitchFamily="34" charset="-122"/>
                 <a:cs typeface="Calibri" pitchFamily="34" charset="-120"/>
               </a:rPr>
-              <a:t>telegraph</a:t>
+              <a:t>telegram</a:t>
             </a:r>
             <a:pPr algn="l" indent="0" marL="0">
               <a:buNone/>
@@ -17540,7 +17540,7 @@
                 <a:ea typeface="Calibri" pitchFamily="34" charset="-122"/>
                 <a:cs typeface="Calibri" pitchFamily="34" charset="-120"/>
               </a:rPr>
-              <a:t>, and broadcast her findings in a </a:t>
+              <a:t> and later studied the </a:t>
             </a:r>
             <a:pPr algn="l" indent="0" marL="0">
               <a:buNone/>
@@ -17557,7 +17557,7 @@
                 <a:ea typeface="Calibri" pitchFamily="34" charset="-122"/>
                 <a:cs typeface="Calibri" pitchFamily="34" charset="-120"/>
               </a:rPr>
-              <a:t>telecast</a:t>
+              <a:t>telegraph</a:t>
             </a:r>
             <a:pPr algn="l" indent="0" marL="0">
               <a:buNone/>
@@ -17571,7 +17571,7 @@
                 <a:ea typeface="Calibri" pitchFamily="34" charset="-122"/>
                 <a:cs typeface="Calibri" pitchFamily="34" charset="-120"/>
               </a:rPr>
-              <a:t>.</a:t>
+              <a:t> records carefully.</a:t>
             </a:r>
             <a:endParaRPr lang="en-US" sz="1800" dirty="0"/>
           </a:p>
@@ -17854,7 +17854,7 @@
                 <a:ea typeface="Trebuchet MS" pitchFamily="34" charset="-122"/>
                 <a:cs typeface="Trebuchet MS" pitchFamily="34" charset="-120"/>
               </a:rPr>
-              <a:t>telegraph</a:t>
+              <a:t>telegram</a:t>
             </a:r>
             <a:endParaRPr lang="en-US" sz="1400" dirty="0"/>
           </a:p>
@@ -17982,7 +17982,7 @@
                 <a:ea typeface="Trebuchet MS" pitchFamily="34" charset="-122"/>
                 <a:cs typeface="Trebuchet MS" pitchFamily="34" charset="-120"/>
               </a:rPr>
-              <a:t>telecast</a:t>
+              <a:t>telegraph</a:t>
             </a:r>
             <a:endParaRPr lang="en-US" sz="1400" dirty="0"/>
           </a:p>
@@ -19569,7 +19569,7 @@
                 <a:ea typeface="Calibri" pitchFamily="34" charset="-122"/>
                 <a:cs typeface="Calibri" pitchFamily="34" charset="-120"/>
               </a:rPr>
-              <a:t>to look, see</a:t>
+              <a:t>to look or see</a:t>
             </a:r>
             <a:endParaRPr lang="en-US" sz="850" dirty="0"/>
           </a:p>
@@ -20554,7 +20554,7 @@
                 <a:ea typeface="Calibri" pitchFamily="34" charset="-122"/>
                 <a:cs typeface="Calibri" pitchFamily="34" charset="-120"/>
               </a:rPr>
-              <a:t>to look, see</a:t>
+              <a:t>to look or see</a:t>
             </a:r>
             <a:endParaRPr lang="en-US" sz="850" dirty="0"/>
           </a:p>
@@ -21776,7 +21776,7 @@
                 <a:ea typeface="Calibri" pitchFamily="34" charset="-122"/>
                 <a:cs typeface="Calibri" pitchFamily="34" charset="-120"/>
               </a:rPr>
-              <a:t>to look, see</a:t>
+              <a:t>to look or see</a:t>
             </a:r>
             <a:endParaRPr lang="en-US" sz="850" dirty="0"/>
           </a:p>
@@ -23170,7 +23170,7 @@
                 <a:ea typeface="Trebuchet MS" pitchFamily="34" charset="-122"/>
                 <a:cs typeface="Trebuchet MS" pitchFamily="34" charset="-120"/>
               </a:rPr>
-              <a:t>telegraph</a:t>
+              <a:t>telegram</a:t>
             </a:r>
             <a:endParaRPr lang="en-US" sz="2800" dirty="0"/>
           </a:p>
@@ -23997,7 +23997,7 @@
                 <a:ea typeface="Trebuchet MS" pitchFamily="34" charset="-122"/>
                 <a:cs typeface="Trebuchet MS" pitchFamily="34" charset="-120"/>
               </a:rPr>
-              <a:t>telegraph</a:t>
+              <a:t>telegram</a:t>
             </a:r>
             <a:endParaRPr lang="en-US" sz="2800" dirty="0"/>
           </a:p>
@@ -24248,7 +24248,7 @@
                 <a:ea typeface="Trebuchet MS" pitchFamily="34" charset="-122"/>
                 <a:cs typeface="Trebuchet MS" pitchFamily="34" charset="-120"/>
               </a:rPr>
-              <a:t>graph</a:t>
+              <a:t>gram</a:t>
             </a:r>
             <a:endParaRPr lang="en-US" sz="1300" dirty="0"/>
           </a:p>
@@ -24287,7 +24287,7 @@
                 <a:ea typeface="Calibri" pitchFamily="34" charset="-122"/>
                 <a:cs typeface="Calibri" pitchFamily="34" charset="-120"/>
               </a:rPr>
-              <a:t>to write or record</a:t>
+              <a:t>something written or recorded</a:t>
             </a:r>
             <a:endParaRPr lang="en-US" sz="850" dirty="0"/>
           </a:p>
@@ -25701,7 +25701,7 @@
                 <a:ea typeface="Trebuchet MS" pitchFamily="34" charset="-122"/>
                 <a:cs typeface="Trebuchet MS" pitchFamily="34" charset="-120"/>
               </a:rPr>
-              <a:t>telegraph</a:t>
+              <a:t>telegram</a:t>
             </a:r>
             <a:endParaRPr lang="en-US" sz="2800" dirty="0"/>
           </a:p>
@@ -25952,7 +25952,7 @@
                 <a:ea typeface="Trebuchet MS" pitchFamily="34" charset="-122"/>
                 <a:cs typeface="Trebuchet MS" pitchFamily="34" charset="-120"/>
               </a:rPr>
-              <a:t>graph</a:t>
+              <a:t>gram</a:t>
             </a:r>
             <a:endParaRPr lang="en-US" sz="1300" dirty="0"/>
           </a:p>
@@ -25991,7 +25991,7 @@
                 <a:ea typeface="Calibri" pitchFamily="34" charset="-122"/>
                 <a:cs typeface="Calibri" pitchFamily="34" charset="-120"/>
               </a:rPr>
-              <a:t>to write or record</a:t>
+              <a:t>something written or recorded</a:t>
             </a:r>
             <a:endParaRPr lang="en-US" sz="850" dirty="0"/>
           </a:p>
@@ -26360,7 +26360,7 @@
                 <a:ea typeface="Trebuchet MS" pitchFamily="34" charset="-122"/>
                 <a:cs typeface="Trebuchet MS" pitchFamily="34" charset="-120"/>
               </a:rPr>
-              <a:t>graph</a:t>
+              <a:t>gram</a:t>
             </a:r>
             <a:endParaRPr lang="en-US" sz="1400" dirty="0"/>
           </a:p>
@@ -26923,7 +26923,7 @@
                 <a:ea typeface="Trebuchet MS" pitchFamily="34" charset="-122"/>
                 <a:cs typeface="Trebuchet MS" pitchFamily="34" charset="-120"/>
               </a:rPr>
-              <a:t>telegraph</a:t>
+              <a:t>telegram</a:t>
             </a:r>
             <a:endParaRPr lang="en-US" sz="2800" dirty="0"/>
           </a:p>
@@ -27174,7 +27174,7 @@
                 <a:ea typeface="Trebuchet MS" pitchFamily="34" charset="-122"/>
                 <a:cs typeface="Trebuchet MS" pitchFamily="34" charset="-120"/>
               </a:rPr>
-              <a:t>graph</a:t>
+              <a:t>gram</a:t>
             </a:r>
             <a:endParaRPr lang="en-US" sz="1300" dirty="0"/>
           </a:p>
@@ -27213,7 +27213,7 @@
                 <a:ea typeface="Calibri" pitchFamily="34" charset="-122"/>
                 <a:cs typeface="Calibri" pitchFamily="34" charset="-120"/>
               </a:rPr>
-              <a:t>to write or record</a:t>
+              <a:t>something written or recorded</a:t>
             </a:r>
             <a:endParaRPr lang="en-US" sz="850" dirty="0"/>
           </a:p>
@@ -27582,7 +27582,7 @@
                 <a:ea typeface="Trebuchet MS" pitchFamily="34" charset="-122"/>
                 <a:cs typeface="Trebuchet MS" pitchFamily="34" charset="-120"/>
               </a:rPr>
-              <a:t>graph</a:t>
+              <a:t>gram</a:t>
             </a:r>
             <a:endParaRPr lang="en-US" sz="1400" dirty="0"/>
           </a:p>
@@ -27663,11 +27663,11 @@
         <p:spPr>
           <a:xfrm>
             <a:off x="1874520" y="4096512"/>
-            <a:ext cx="6903720" cy="804672"/>
+            <a:ext cx="6903720" cy="658368"/>
           </a:xfrm>
           <a:prstGeom prst="rect">
             <a:avLst>
-              <a:gd name="adj" fmla="val 6818"/>
+              <a:gd name="adj" fmla="val 8333"/>
             </a:avLst>
           </a:prstGeom>
           <a:solidFill>
@@ -27689,12 +27689,12 @@
         </p:nvSpPr>
         <p:spPr>
           <a:xfrm>
-            <a:off x="2124837" y="4169664"/>
-            <a:ext cx="685800" cy="384048"/>
+            <a:off x="2023872" y="4169664"/>
+            <a:ext cx="685800" cy="475488"/>
           </a:xfrm>
           <a:prstGeom prst="rect">
             <a:avLst>
-              <a:gd name="adj" fmla="val 9524"/>
+              <a:gd name="adj" fmla="val 7692"/>
             </a:avLst>
           </a:prstGeom>
           <a:solidFill>
@@ -27716,8 +27716,8 @@
         </p:nvSpPr>
         <p:spPr>
           <a:xfrm>
-            <a:off x="2124837" y="4169664"/>
-            <a:ext cx="685800" cy="384048"/>
+            <a:off x="2023872" y="4169664"/>
+            <a:ext cx="685800" cy="475488"/>
           </a:xfrm>
           <a:prstGeom prst="rect">
             <a:avLst/>
@@ -27755,12 +27755,12 @@
         </p:nvSpPr>
         <p:spPr>
           <a:xfrm>
-            <a:off x="3033522" y="4169664"/>
-            <a:ext cx="685800" cy="384048"/>
+            <a:off x="2831592" y="4169664"/>
+            <a:ext cx="685800" cy="475488"/>
           </a:xfrm>
           <a:prstGeom prst="rect">
             <a:avLst>
-              <a:gd name="adj" fmla="val 9524"/>
+              <a:gd name="adj" fmla="val 7692"/>
             </a:avLst>
           </a:prstGeom>
           <a:solidFill>
@@ -27782,8 +27782,8 @@
         </p:nvSpPr>
         <p:spPr>
           <a:xfrm>
-            <a:off x="3033522" y="4169664"/>
-            <a:ext cx="685800" cy="384048"/>
+            <a:off x="2831592" y="4169664"/>
+            <a:ext cx="685800" cy="475488"/>
           </a:xfrm>
           <a:prstGeom prst="rect">
             <a:avLst/>
@@ -27821,12 +27821,12 @@
         </p:nvSpPr>
         <p:spPr>
           <a:xfrm>
-            <a:off x="3942207" y="4169664"/>
-            <a:ext cx="685800" cy="384048"/>
+            <a:off x="3639312" y="4169664"/>
+            <a:ext cx="685800" cy="475488"/>
           </a:xfrm>
           <a:prstGeom prst="rect">
             <a:avLst>
-              <a:gd name="adj" fmla="val 9524"/>
+              <a:gd name="adj" fmla="val 7692"/>
             </a:avLst>
           </a:prstGeom>
           <a:solidFill>
@@ -27848,8 +27848,8 @@
         </p:nvSpPr>
         <p:spPr>
           <a:xfrm>
-            <a:off x="3942207" y="4169664"/>
-            <a:ext cx="685800" cy="384048"/>
+            <a:off x="3639312" y="4169664"/>
+            <a:ext cx="685800" cy="475488"/>
           </a:xfrm>
           <a:prstGeom prst="rect">
             <a:avLst/>
@@ -27887,12 +27887,12 @@
         </p:nvSpPr>
         <p:spPr>
           <a:xfrm>
-            <a:off x="4850892" y="4169664"/>
-            <a:ext cx="685800" cy="384048"/>
+            <a:off x="4447032" y="4169664"/>
+            <a:ext cx="685800" cy="475488"/>
           </a:xfrm>
           <a:prstGeom prst="rect">
             <a:avLst>
-              <a:gd name="adj" fmla="val 9524"/>
+              <a:gd name="adj" fmla="val 7692"/>
             </a:avLst>
           </a:prstGeom>
           <a:solidFill>
@@ -27914,8 +27914,8 @@
         </p:nvSpPr>
         <p:spPr>
           <a:xfrm>
-            <a:off x="4850892" y="4169664"/>
-            <a:ext cx="685800" cy="384048"/>
+            <a:off x="4447032" y="4169664"/>
+            <a:ext cx="685800" cy="475488"/>
           </a:xfrm>
           <a:prstGeom prst="rect">
             <a:avLst/>
@@ -27953,12 +27953,12 @@
         </p:nvSpPr>
         <p:spPr>
           <a:xfrm>
-            <a:off x="5759577" y="4169664"/>
-            <a:ext cx="685800" cy="384048"/>
+            <a:off x="5254752" y="4169664"/>
+            <a:ext cx="685800" cy="475488"/>
           </a:xfrm>
           <a:prstGeom prst="rect">
             <a:avLst>
-              <a:gd name="adj" fmla="val 9524"/>
+              <a:gd name="adj" fmla="val 7692"/>
             </a:avLst>
           </a:prstGeom>
           <a:solidFill>
@@ -27980,8 +27980,8 @@
         </p:nvSpPr>
         <p:spPr>
           <a:xfrm>
-            <a:off x="5759577" y="4169664"/>
-            <a:ext cx="685800" cy="384048"/>
+            <a:off x="5254752" y="4169664"/>
+            <a:ext cx="685800" cy="475488"/>
           </a:xfrm>
           <a:prstGeom prst="rect">
             <a:avLst/>
@@ -28005,7 +28005,7 @@
                 <a:ea typeface="Trebuchet MS" pitchFamily="34" charset="-122"/>
                 <a:cs typeface="Trebuchet MS" pitchFamily="34" charset="-120"/>
               </a:rPr>
-              <a:t>gr</a:t>
+              <a:t>g</a:t>
             </a:r>
             <a:endParaRPr lang="en-US" sz="900" dirty="0"/>
           </a:p>
@@ -28019,12 +28019,12 @@
         </p:nvSpPr>
         <p:spPr>
           <a:xfrm>
-            <a:off x="6668262" y="4169664"/>
-            <a:ext cx="685800" cy="384048"/>
+            <a:off x="6062472" y="4169664"/>
+            <a:ext cx="685800" cy="475488"/>
           </a:xfrm>
           <a:prstGeom prst="rect">
             <a:avLst>
-              <a:gd name="adj" fmla="val 9524"/>
+              <a:gd name="adj" fmla="val 7692"/>
             </a:avLst>
           </a:prstGeom>
           <a:solidFill>
@@ -28046,8 +28046,8 @@
         </p:nvSpPr>
         <p:spPr>
           <a:xfrm>
-            <a:off x="6668262" y="4169664"/>
-            <a:ext cx="685800" cy="384048"/>
+            <a:off x="6062472" y="4169664"/>
+            <a:ext cx="685800" cy="475488"/>
           </a:xfrm>
           <a:prstGeom prst="rect">
             <a:avLst/>
@@ -28071,7 +28071,7 @@
                 <a:ea typeface="Trebuchet MS" pitchFamily="34" charset="-122"/>
                 <a:cs typeface="Trebuchet MS" pitchFamily="34" charset="-120"/>
               </a:rPr>
-              <a:t>a</a:t>
+              <a:t>r</a:t>
             </a:r>
             <a:endParaRPr lang="en-US" sz="900" dirty="0"/>
           </a:p>
@@ -28085,12 +28085,12 @@
         </p:nvSpPr>
         <p:spPr>
           <a:xfrm>
-            <a:off x="7576947" y="4169664"/>
-            <a:ext cx="685800" cy="384048"/>
+            <a:off x="6870192" y="4169664"/>
+            <a:ext cx="685800" cy="475488"/>
           </a:xfrm>
           <a:prstGeom prst="rect">
             <a:avLst>
-              <a:gd name="adj" fmla="val 9524"/>
+              <a:gd name="adj" fmla="val 7692"/>
             </a:avLst>
           </a:prstGeom>
           <a:solidFill>
@@ -28112,8 +28112,8 @@
         </p:nvSpPr>
         <p:spPr>
           <a:xfrm>
-            <a:off x="7576947" y="4169664"/>
-            <a:ext cx="685800" cy="384048"/>
+            <a:off x="6870192" y="4169664"/>
+            <a:ext cx="685800" cy="475488"/>
           </a:xfrm>
           <a:prstGeom prst="rect">
             <a:avLst/>
@@ -28137,7 +28137,7 @@
                 <a:ea typeface="Trebuchet MS" pitchFamily="34" charset="-122"/>
                 <a:cs typeface="Trebuchet MS" pitchFamily="34" charset="-120"/>
               </a:rPr>
-              <a:t>ph</a:t>
+              <a:t>a</a:t>
             </a:r>
             <a:endParaRPr lang="en-US" sz="900" dirty="0"/>
           </a:p>
@@ -28145,40 +28145,67 @@
       </p:sp>
       <p:sp>
         <p:nvSpPr>
-          <p:cNvPr id="50" name="Text 48"/>
-          <p:cNvSpPr/>
-          <p:nvPr/>
-        </p:nvSpPr>
-        <p:spPr>
-          <a:xfrm>
-            <a:off x="7576947" y="4572000"/>
-            <a:ext cx="685800" cy="219456"/>
-          </a:xfrm>
-          <a:prstGeom prst="rect">
-            <a:avLst/>
-          </a:prstGeom>
-          <a:noFill/>
-          <a:ln/>
-        </p:spPr>
-        <p:txBody>
-          <a:bodyPr wrap="square" lIns="0" tIns="0" rIns="0" bIns="0" rtlCol="0" anchor="t"/>
-          <a:lstStyle/>
-          <a:p>
-            <a:pPr algn="ctr" indent="0" marL="0">
-              <a:buNone/>
-            </a:pPr>
-            <a:r>
-              <a:rPr lang="en-US" sz="750" i="1" dirty="0">
-                <a:solidFill>
-                  <a:srgbClr val="94A3B8"/>
-                </a:solidFill>
-                <a:latin typeface="Calibri" pitchFamily="34" charset="0"/>
-                <a:ea typeface="Calibri" pitchFamily="34" charset="-122"/>
-                <a:cs typeface="Calibri" pitchFamily="34" charset="-120"/>
-              </a:rPr>
-              <a:t>/f/</a:t>
-            </a:r>
-            <a:endParaRPr lang="en-US" sz="750" dirty="0"/>
+          <p:cNvPr id="50" name="Shape 48"/>
+          <p:cNvSpPr/>
+          <p:nvPr/>
+        </p:nvSpPr>
+        <p:spPr>
+          <a:xfrm>
+            <a:off x="7677912" y="4169664"/>
+            <a:ext cx="685800" cy="475488"/>
+          </a:xfrm>
+          <a:prstGeom prst="rect">
+            <a:avLst>
+              <a:gd name="adj" fmla="val 7692"/>
+            </a:avLst>
+          </a:prstGeom>
+          <a:solidFill>
+            <a:srgbClr val="FFFFFF"/>
+          </a:solidFill>
+          <a:ln w="12700">
+            <a:solidFill>
+              <a:srgbClr val="DB2777"/>
+            </a:solidFill>
+            <a:prstDash val="solid"/>
+          </a:ln>
+        </p:spPr>
+      </p:sp>
+      <p:sp>
+        <p:nvSpPr>
+          <p:cNvPr id="51" name="Text 49"/>
+          <p:cNvSpPr/>
+          <p:nvPr/>
+        </p:nvSpPr>
+        <p:spPr>
+          <a:xfrm>
+            <a:off x="7677912" y="4169664"/>
+            <a:ext cx="685800" cy="475488"/>
+          </a:xfrm>
+          <a:prstGeom prst="rect">
+            <a:avLst/>
+          </a:prstGeom>
+          <a:noFill/>
+          <a:ln/>
+        </p:spPr>
+        <p:txBody>
+          <a:bodyPr wrap="square" lIns="0" tIns="0" rIns="0" bIns="0" rtlCol="0" anchor="ctr"/>
+          <a:lstStyle/>
+          <a:p>
+            <a:pPr algn="ctr" indent="0" marL="0">
+              <a:buNone/>
+            </a:pPr>
+            <a:r>
+              <a:rPr lang="en-US" sz="900" b="1" dirty="0">
+                <a:solidFill>
+                  <a:srgbClr val="9D174D"/>
+                </a:solidFill>
+                <a:latin typeface="Trebuchet MS" pitchFamily="34" charset="0"/>
+                <a:ea typeface="Trebuchet MS" pitchFamily="34" charset="-122"/>
+                <a:cs typeface="Trebuchet MS" pitchFamily="34" charset="-120"/>
+              </a:rPr>
+              <a:t>m</a:t>
+            </a:r>
+            <a:endParaRPr lang="en-US" sz="900" dirty="0"/>
           </a:p>
         </p:txBody>
       </p:sp>
@@ -28607,7 +28634,7 @@
                 <a:ea typeface="Trebuchet MS" pitchFamily="34" charset="-122"/>
                 <a:cs typeface="Trebuchet MS" pitchFamily="34" charset="-120"/>
               </a:rPr>
-              <a:t>telecast</a:t>
+              <a:t>telegraph</a:t>
             </a:r>
             <a:endParaRPr lang="en-US" sz="2800" dirty="0"/>
           </a:p>
@@ -29434,7 +29461,7 @@
                 <a:ea typeface="Trebuchet MS" pitchFamily="34" charset="-122"/>
                 <a:cs typeface="Trebuchet MS" pitchFamily="34" charset="-120"/>
               </a:rPr>
-              <a:t>telecast</a:t>
+              <a:t>telegraph</a:t>
             </a:r>
             <a:endParaRPr lang="en-US" sz="2800" dirty="0"/>
           </a:p>
@@ -29685,7 +29712,7 @@
                 <a:ea typeface="Trebuchet MS" pitchFamily="34" charset="-122"/>
                 <a:cs typeface="Trebuchet MS" pitchFamily="34" charset="-120"/>
               </a:rPr>
-              <a:t>cast</a:t>
+              <a:t>graph</a:t>
             </a:r>
             <a:endParaRPr lang="en-US" sz="1300" dirty="0"/>
           </a:p>
@@ -29724,7 +29751,7 @@
                 <a:ea typeface="Calibri" pitchFamily="34" charset="-122"/>
                 <a:cs typeface="Calibri" pitchFamily="34" charset="-120"/>
               </a:rPr>
-              <a:t>to throw or send out</a:t>
+              <a:t>to write or record</a:t>
             </a:r>
             <a:endParaRPr lang="en-US" sz="850" dirty="0"/>
           </a:p>
@@ -30419,7 +30446,7 @@
                 <a:ea typeface="Trebuchet MS" pitchFamily="34" charset="-122"/>
                 <a:cs typeface="Trebuchet MS" pitchFamily="34" charset="-120"/>
               </a:rPr>
-              <a:t>telecast</a:t>
+              <a:t>telegraph</a:t>
             </a:r>
             <a:endParaRPr lang="en-US" sz="2800" dirty="0"/>
           </a:p>
@@ -30670,7 +30697,7 @@
                 <a:ea typeface="Trebuchet MS" pitchFamily="34" charset="-122"/>
                 <a:cs typeface="Trebuchet MS" pitchFamily="34" charset="-120"/>
               </a:rPr>
-              <a:t>cast</a:t>
+              <a:t>graph</a:t>
             </a:r>
             <a:endParaRPr lang="en-US" sz="1300" dirty="0"/>
           </a:p>
@@ -30709,7 +30736,7 @@
                 <a:ea typeface="Calibri" pitchFamily="34" charset="-122"/>
                 <a:cs typeface="Calibri" pitchFamily="34" charset="-120"/>
               </a:rPr>
-              <a:t>to throw or send out</a:t>
+              <a:t>to write or record</a:t>
             </a:r>
             <a:endParaRPr lang="en-US" sz="850" dirty="0"/>
           </a:p>
@@ -31078,7 +31105,7 @@
                 <a:ea typeface="Trebuchet MS" pitchFamily="34" charset="-122"/>
                 <a:cs typeface="Trebuchet MS" pitchFamily="34" charset="-120"/>
               </a:rPr>
-              <a:t>cast</a:t>
+              <a:t>graph</a:t>
             </a:r>
             <a:endParaRPr lang="en-US" sz="1400" dirty="0"/>
           </a:p>
@@ -31641,7 +31668,7 @@
                 <a:ea typeface="Trebuchet MS" pitchFamily="34" charset="-122"/>
                 <a:cs typeface="Trebuchet MS" pitchFamily="34" charset="-120"/>
               </a:rPr>
-              <a:t>telecast</a:t>
+              <a:t>telegraph</a:t>
             </a:r>
             <a:endParaRPr lang="en-US" sz="2800" dirty="0"/>
           </a:p>
@@ -31892,7 +31919,7 @@
                 <a:ea typeface="Trebuchet MS" pitchFamily="34" charset="-122"/>
                 <a:cs typeface="Trebuchet MS" pitchFamily="34" charset="-120"/>
               </a:rPr>
-              <a:t>cast</a:t>
+              <a:t>graph</a:t>
             </a:r>
             <a:endParaRPr lang="en-US" sz="1300" dirty="0"/>
           </a:p>
@@ -31931,7 +31958,7 @@
                 <a:ea typeface="Calibri" pitchFamily="34" charset="-122"/>
                 <a:cs typeface="Calibri" pitchFamily="34" charset="-120"/>
               </a:rPr>
-              <a:t>to throw or send out</a:t>
+              <a:t>to write or record</a:t>
             </a:r>
             <a:endParaRPr lang="en-US" sz="850" dirty="0"/>
           </a:p>
@@ -32300,7 +32327,7 @@
                 <a:ea typeface="Trebuchet MS" pitchFamily="34" charset="-122"/>
                 <a:cs typeface="Trebuchet MS" pitchFamily="34" charset="-120"/>
               </a:rPr>
-              <a:t>cast</a:t>
+              <a:t>graph</a:t>
             </a:r>
             <a:endParaRPr lang="en-US" sz="1400" dirty="0"/>
           </a:p>
@@ -32381,11 +32408,11 @@
         <p:spPr>
           <a:xfrm>
             <a:off x="1874520" y="4096512"/>
-            <a:ext cx="6903720" cy="658368"/>
+            <a:ext cx="6903720" cy="804672"/>
           </a:xfrm>
           <a:prstGeom prst="rect">
             <a:avLst>
-              <a:gd name="adj" fmla="val 8333"/>
+              <a:gd name="adj" fmla="val 6818"/>
             </a:avLst>
           </a:prstGeom>
           <a:solidFill>
@@ -32408,11 +32435,11 @@
         <p:spPr>
           <a:xfrm>
             <a:off x="2023872" y="4169664"/>
-            <a:ext cx="685800" cy="475488"/>
+            <a:ext cx="685800" cy="384048"/>
           </a:xfrm>
           <a:prstGeom prst="rect">
             <a:avLst>
-              <a:gd name="adj" fmla="val 7692"/>
+              <a:gd name="adj" fmla="val 9524"/>
             </a:avLst>
           </a:prstGeom>
           <a:solidFill>
@@ -32435,7 +32462,7 @@
         <p:spPr>
           <a:xfrm>
             <a:off x="2023872" y="4169664"/>
-            <a:ext cx="685800" cy="475488"/>
+            <a:ext cx="685800" cy="384048"/>
           </a:xfrm>
           <a:prstGeom prst="rect">
             <a:avLst/>
@@ -32474,11 +32501,11 @@
         <p:spPr>
           <a:xfrm>
             <a:off x="2831592" y="4169664"/>
-            <a:ext cx="685800" cy="475488"/>
+            <a:ext cx="685800" cy="384048"/>
           </a:xfrm>
           <a:prstGeom prst="rect">
             <a:avLst>
-              <a:gd name="adj" fmla="val 7692"/>
+              <a:gd name="adj" fmla="val 9524"/>
             </a:avLst>
           </a:prstGeom>
           <a:solidFill>
@@ -32501,7 +32528,7 @@
         <p:spPr>
           <a:xfrm>
             <a:off x="2831592" y="4169664"/>
-            <a:ext cx="685800" cy="475488"/>
+            <a:ext cx="685800" cy="384048"/>
           </a:xfrm>
           <a:prstGeom prst="rect">
             <a:avLst/>
@@ -32540,11 +32567,11 @@
         <p:spPr>
           <a:xfrm>
             <a:off x="3639312" y="4169664"/>
-            <a:ext cx="685800" cy="475488"/>
+            <a:ext cx="685800" cy="384048"/>
           </a:xfrm>
           <a:prstGeom prst="rect">
             <a:avLst>
-              <a:gd name="adj" fmla="val 7692"/>
+              <a:gd name="adj" fmla="val 9524"/>
             </a:avLst>
           </a:prstGeom>
           <a:solidFill>
@@ -32567,7 +32594,7 @@
         <p:spPr>
           <a:xfrm>
             <a:off x="3639312" y="4169664"/>
-            <a:ext cx="685800" cy="475488"/>
+            <a:ext cx="685800" cy="384048"/>
           </a:xfrm>
           <a:prstGeom prst="rect">
             <a:avLst/>
@@ -32606,11 +32633,11 @@
         <p:spPr>
           <a:xfrm>
             <a:off x="4447032" y="4169664"/>
-            <a:ext cx="685800" cy="475488"/>
+            <a:ext cx="685800" cy="384048"/>
           </a:xfrm>
           <a:prstGeom prst="rect">
             <a:avLst>
-              <a:gd name="adj" fmla="val 7692"/>
+              <a:gd name="adj" fmla="val 9524"/>
             </a:avLst>
           </a:prstGeom>
           <a:solidFill>
@@ -32633,7 +32660,7 @@
         <p:spPr>
           <a:xfrm>
             <a:off x="4447032" y="4169664"/>
-            <a:ext cx="685800" cy="475488"/>
+            <a:ext cx="685800" cy="384048"/>
           </a:xfrm>
           <a:prstGeom prst="rect">
             <a:avLst/>
@@ -32672,11 +32699,11 @@
         <p:spPr>
           <a:xfrm>
             <a:off x="5254752" y="4169664"/>
-            <a:ext cx="685800" cy="475488"/>
+            <a:ext cx="685800" cy="384048"/>
           </a:xfrm>
           <a:prstGeom prst="rect">
             <a:avLst>
-              <a:gd name="adj" fmla="val 7692"/>
+              <a:gd name="adj" fmla="val 9524"/>
             </a:avLst>
           </a:prstGeom>
           <a:solidFill>
@@ -32699,7 +32726,7 @@
         <p:spPr>
           <a:xfrm>
             <a:off x="5254752" y="4169664"/>
-            <a:ext cx="685800" cy="475488"/>
+            <a:ext cx="685800" cy="384048"/>
           </a:xfrm>
           <a:prstGeom prst="rect">
             <a:avLst/>
@@ -32723,7 +32750,7 @@
                 <a:ea typeface="Trebuchet MS" pitchFamily="34" charset="-122"/>
                 <a:cs typeface="Trebuchet MS" pitchFamily="34" charset="-120"/>
               </a:rPr>
-              <a:t>c</a:t>
+              <a:t>g</a:t>
             </a:r>
             <a:endParaRPr lang="en-US" sz="900" dirty="0"/>
           </a:p>
@@ -32738,11 +32765,11 @@
         <p:spPr>
           <a:xfrm>
             <a:off x="6062472" y="4169664"/>
-            <a:ext cx="685800" cy="475488"/>
+            <a:ext cx="685800" cy="384048"/>
           </a:xfrm>
           <a:prstGeom prst="rect">
             <a:avLst>
-              <a:gd name="adj" fmla="val 7692"/>
+              <a:gd name="adj" fmla="val 9524"/>
             </a:avLst>
           </a:prstGeom>
           <a:solidFill>
@@ -32765,7 +32792,7 @@
         <p:spPr>
           <a:xfrm>
             <a:off x="6062472" y="4169664"/>
-            <a:ext cx="685800" cy="475488"/>
+            <a:ext cx="685800" cy="384048"/>
           </a:xfrm>
           <a:prstGeom prst="rect">
             <a:avLst/>
@@ -32789,7 +32816,7 @@
                 <a:ea typeface="Trebuchet MS" pitchFamily="34" charset="-122"/>
                 <a:cs typeface="Trebuchet MS" pitchFamily="34" charset="-120"/>
               </a:rPr>
-              <a:t>a</a:t>
+              <a:t>r</a:t>
             </a:r>
             <a:endParaRPr lang="en-US" sz="900" dirty="0"/>
           </a:p>
@@ -32804,11 +32831,11 @@
         <p:spPr>
           <a:xfrm>
             <a:off x="6870192" y="4169664"/>
-            <a:ext cx="685800" cy="475488"/>
+            <a:ext cx="685800" cy="384048"/>
           </a:xfrm>
           <a:prstGeom prst="rect">
             <a:avLst>
-              <a:gd name="adj" fmla="val 7692"/>
+              <a:gd name="adj" fmla="val 9524"/>
             </a:avLst>
           </a:prstGeom>
           <a:solidFill>
@@ -32831,7 +32858,7 @@
         <p:spPr>
           <a:xfrm>
             <a:off x="6870192" y="4169664"/>
-            <a:ext cx="685800" cy="475488"/>
+            <a:ext cx="685800" cy="384048"/>
           </a:xfrm>
           <a:prstGeom prst="rect">
             <a:avLst/>
@@ -32855,7 +32882,7 @@
                 <a:ea typeface="Trebuchet MS" pitchFamily="34" charset="-122"/>
                 <a:cs typeface="Trebuchet MS" pitchFamily="34" charset="-120"/>
               </a:rPr>
-              <a:t>s</a:t>
+              <a:t>a</a:t>
             </a:r>
             <a:endParaRPr lang="en-US" sz="900" dirty="0"/>
           </a:p>
@@ -32870,11 +32897,11 @@
         <p:spPr>
           <a:xfrm>
             <a:off x="7677912" y="4169664"/>
-            <a:ext cx="685800" cy="475488"/>
+            <a:ext cx="685800" cy="384048"/>
           </a:xfrm>
           <a:prstGeom prst="rect">
             <a:avLst>
-              <a:gd name="adj" fmla="val 7692"/>
+              <a:gd name="adj" fmla="val 9524"/>
             </a:avLst>
           </a:prstGeom>
           <a:solidFill>
@@ -32897,7 +32924,7 @@
         <p:spPr>
           <a:xfrm>
             <a:off x="7677912" y="4169664"/>
-            <a:ext cx="685800" cy="475488"/>
+            <a:ext cx="685800" cy="384048"/>
           </a:xfrm>
           <a:prstGeom prst="rect">
             <a:avLst/>
@@ -32921,9 +32948,48 @@
                 <a:ea typeface="Trebuchet MS" pitchFamily="34" charset="-122"/>
                 <a:cs typeface="Trebuchet MS" pitchFamily="34" charset="-120"/>
               </a:rPr>
-              <a:t>t</a:t>
+              <a:t>ph</a:t>
             </a:r>
             <a:endParaRPr lang="en-US" sz="900" dirty="0"/>
+          </a:p>
+        </p:txBody>
+      </p:sp>
+      <p:sp>
+        <p:nvSpPr>
+          <p:cNvPr id="52" name="Text 50"/>
+          <p:cNvSpPr/>
+          <p:nvPr/>
+        </p:nvSpPr>
+        <p:spPr>
+          <a:xfrm>
+            <a:off x="7677912" y="4572000"/>
+            <a:ext cx="685800" cy="219456"/>
+          </a:xfrm>
+          <a:prstGeom prst="rect">
+            <a:avLst/>
+          </a:prstGeom>
+          <a:noFill/>
+          <a:ln/>
+        </p:spPr>
+        <p:txBody>
+          <a:bodyPr wrap="square" lIns="0" tIns="0" rIns="0" bIns="0" rtlCol="0" anchor="t"/>
+          <a:lstStyle/>
+          <a:p>
+            <a:pPr algn="ctr" indent="0" marL="0">
+              <a:buNone/>
+            </a:pPr>
+            <a:r>
+              <a:rPr lang="en-US" sz="750" i="1" dirty="0">
+                <a:solidFill>
+                  <a:srgbClr val="94A3B8"/>
+                </a:solidFill>
+                <a:latin typeface="Calibri" pitchFamily="34" charset="0"/>
+                <a:ea typeface="Calibri" pitchFamily="34" charset="-122"/>
+                <a:cs typeface="Calibri" pitchFamily="34" charset="-120"/>
+              </a:rPr>
+              <a:t>/f/</a:t>
+            </a:r>
+            <a:endParaRPr lang="en-US" sz="750" dirty="0"/>
           </a:p>
         </p:txBody>
       </p:sp>
@@ -34683,7 +34749,7 @@
                 <a:ea typeface="Trebuchet MS" pitchFamily="34" charset="-122"/>
                 <a:cs typeface="Trebuchet MS" pitchFamily="34" charset="-120"/>
               </a:rPr>
-              <a:t>micro-</a:t>
+              <a:t>auto-</a:t>
             </a:r>
             <a:endParaRPr lang="en-US" sz="1300" dirty="0"/>
           </a:p>
@@ -34875,7 +34941,7 @@
                 <a:ea typeface="Trebuchet MS" pitchFamily="34" charset="-122"/>
                 <a:cs typeface="Trebuchet MS" pitchFamily="34" charset="-120"/>
               </a:rPr>
-              <a:t>bio-</a:t>
+              <a:t>micro-</a:t>
             </a:r>
             <a:endParaRPr lang="en-US" sz="1300" dirty="0"/>
           </a:p>
@@ -35028,7 +35094,7 @@
                 <a:ea typeface="Trebuchet MS" pitchFamily="34" charset="-122"/>
                 <a:cs typeface="Trebuchet MS" pitchFamily="34" charset="-120"/>
               </a:rPr>
-              <a:t>geo-</a:t>
+              <a:t>photo-</a:t>
             </a:r>
             <a:endParaRPr lang="en-US" sz="1300" dirty="0"/>
           </a:p>
@@ -35117,7 +35183,7 @@
                 <a:ea typeface="Trebuchet MS" pitchFamily="34" charset="-122"/>
                 <a:cs typeface="Trebuchet MS" pitchFamily="34" charset="-120"/>
               </a:rPr>
-              <a:t>-vision</a:t>
+              <a:t>-graph</a:t>
             </a:r>
             <a:endParaRPr lang="en-US" sz="1300" dirty="0"/>
           </a:p>
@@ -35181,7 +35247,7 @@
                 <a:ea typeface="Trebuchet MS" pitchFamily="34" charset="-122"/>
                 <a:cs typeface="Trebuchet MS" pitchFamily="34" charset="-120"/>
               </a:rPr>
-              <a:t>astro-</a:t>
+              <a:t>cyber-</a:t>
             </a:r>
             <a:endParaRPr lang="en-US" sz="1300" dirty="0"/>
           </a:p>
@@ -35270,7 +35336,7 @@
                 <a:ea typeface="Trebuchet MS" pitchFamily="34" charset="-122"/>
                 <a:cs typeface="Trebuchet MS" pitchFamily="34" charset="-120"/>
               </a:rPr>
-              <a:t>-graph</a:t>
+              <a:t>-vision</a:t>
             </a:r>
             <a:endParaRPr lang="en-US" sz="1300" dirty="0"/>
           </a:p>
@@ -35334,7 +35400,7 @@
                 <a:ea typeface="Trebuchet MS" pitchFamily="34" charset="-122"/>
                 <a:cs typeface="Trebuchet MS" pitchFamily="34" charset="-120"/>
               </a:rPr>
-              <a:t>cyber-</a:t>
+              <a:t>mega-</a:t>
             </a:r>
             <a:endParaRPr lang="en-US" sz="1300" dirty="0"/>
           </a:p>
@@ -35726,7 +35792,7 @@
                 <a:ea typeface="Trebuchet MS" pitchFamily="34" charset="-122"/>
                 <a:cs typeface="Trebuchet MS" pitchFamily="34" charset="-120"/>
               </a:rPr>
-              <a:t>telegraph</a:t>
+              <a:t>telegram</a:t>
             </a:r>
             <a:endParaRPr lang="en-US" sz="1200" dirty="0"/>
           </a:p>
@@ -35792,7 +35858,7 @@
                 <a:ea typeface="Trebuchet MS" pitchFamily="34" charset="-122"/>
                 <a:cs typeface="Trebuchet MS" pitchFamily="34" charset="-120"/>
               </a:rPr>
-              <a:t>teleport</a:t>
+              <a:t>telepathy</a:t>
             </a:r>
             <a:endParaRPr lang="en-US" sz="1200" dirty="0"/>
           </a:p>
@@ -35858,7 +35924,7 @@
                 <a:ea typeface="Trebuchet MS" pitchFamily="34" charset="-122"/>
                 <a:cs typeface="Trebuchet MS" pitchFamily="34" charset="-120"/>
               </a:rPr>
-              <a:t>telepathy</a:t>
+              <a:t>teleport</a:t>
             </a:r>
             <a:endParaRPr lang="en-US" sz="1200" dirty="0"/>
           </a:p>
@@ -35990,7 +36056,7 @@
                 <a:ea typeface="Trebuchet MS" pitchFamily="34" charset="-122"/>
                 <a:cs typeface="Trebuchet MS" pitchFamily="34" charset="-120"/>
               </a:rPr>
-              <a:t>telemetry</a:t>
+              <a:t>telegraph</a:t>
             </a:r>
             <a:endParaRPr lang="en-US" sz="1200" dirty="0"/>
           </a:p>
@@ -37178,7 +37244,7 @@
                 <a:ea typeface="Calibri" pitchFamily="34" charset="-122"/>
                 <a:cs typeface="Calibri" pitchFamily="34" charset="-120"/>
               </a:rPr>
-              <a:t>1.  The morpheme 'tele' comes from Greek and means 'far away'.</a:t>
+              <a:t>1.  The morpheme 'tele' means 'small' or 'tiny'.</a:t>
             </a:r>
             <a:endParaRPr lang="en-US" sz="1300" dirty="0"/>
           </a:p>
@@ -37201,11 +37267,11 @@
             </a:avLst>
           </a:prstGeom>
           <a:solidFill>
-            <a:srgbClr val="DCFCE7"/>
-          </a:solidFill>
-          <a:ln w="12700">
-            <a:solidFill>
-              <a:srgbClr val="16A34A"/>
+            <a:srgbClr val="FEE2E2"/>
+          </a:solidFill>
+          <a:ln w="12700">
+            <a:solidFill>
+              <a:srgbClr val="DC2626"/>
             </a:solidFill>
             <a:prstDash val="solid"/>
           </a:ln>
@@ -37238,13 +37304,13 @@
             <a:r>
               <a:rPr lang="en-US" sz="1100" b="1" dirty="0">
                 <a:solidFill>
-                  <a:srgbClr val="16A34A"/>
+                  <a:srgbClr val="DC2626"/>
                 </a:solidFill>
                 <a:latin typeface="Trebuchet MS" pitchFamily="34" charset="0"/>
                 <a:ea typeface="Trebuchet MS" pitchFamily="34" charset="-122"/>
                 <a:cs typeface="Trebuchet MS" pitchFamily="34" charset="-120"/>
               </a:rPr>
-              <a:t>TRUE</a:t>
+              <a:t>FALSE</a:t>
             </a:r>
             <a:endParaRPr lang="en-US" sz="1100" dirty="0"/>
           </a:p>
@@ -37317,7 +37383,7 @@
                 <a:ea typeface="Calibri" pitchFamily="34" charset="-122"/>
                 <a:cs typeface="Calibri" pitchFamily="34" charset="-120"/>
               </a:rPr>
-              <a:t>2.  A telescope is used to make very small things look bigger under a lens.</a:t>
+              <a:t>2.  The morpheme 'tele' means 'far away' or 'at a distance'.</a:t>
             </a:r>
             <a:endParaRPr lang="en-US" sz="1300" dirty="0"/>
           </a:p>
@@ -37340,11 +37406,11 @@
             </a:avLst>
           </a:prstGeom>
           <a:solidFill>
-            <a:srgbClr val="FEE2E2"/>
-          </a:solidFill>
-          <a:ln w="12700">
-            <a:solidFill>
-              <a:srgbClr val="DC2626"/>
+            <a:srgbClr val="DCFCE7"/>
+          </a:solidFill>
+          <a:ln w="12700">
+            <a:solidFill>
+              <a:srgbClr val="16A34A"/>
             </a:solidFill>
             <a:prstDash val="solid"/>
           </a:ln>
@@ -37377,13 +37443,13 @@
             <a:r>
               <a:rPr lang="en-US" sz="1100" b="1" dirty="0">
                 <a:solidFill>
-                  <a:srgbClr val="DC2626"/>
+                  <a:srgbClr val="16A34A"/>
                 </a:solidFill>
                 <a:latin typeface="Trebuchet MS" pitchFamily="34" charset="0"/>
                 <a:ea typeface="Trebuchet MS" pitchFamily="34" charset="-122"/>
                 <a:cs typeface="Trebuchet MS" pitchFamily="34" charset="-120"/>
               </a:rPr>
-              <a:t>FALSE</a:t>
+              <a:t>TRUE</a:t>
             </a:r>
             <a:endParaRPr lang="en-US" sz="1100" dirty="0"/>
           </a:p>
@@ -37456,7 +37522,7 @@
                 <a:ea typeface="Calibri" pitchFamily="34" charset="-122"/>
                 <a:cs typeface="Calibri" pitchFamily="34" charset="-120"/>
               </a:rPr>
-              <a:t>3.  The word 'telephone' contains the morpheme 'tele' meaning 'far away'.</a:t>
+              <a:t>3.  A telescope uses the morpheme 'tele' because it helps you see things that are far away.</a:t>
             </a:r>
             <a:endParaRPr lang="en-US" sz="1300" dirty="0"/>
           </a:p>
@@ -37595,7 +37661,7 @@
                 <a:ea typeface="Calibri" pitchFamily="34" charset="-122"/>
                 <a:cs typeface="Calibri" pitchFamily="34" charset="-120"/>
               </a:rPr>
-              <a:t>4.  Words with 'tele' in them often relate to sending or receiving things over a distance.</a:t>
+              <a:t>4.  The word 'telephone' contains the morpheme 'tele'.</a:t>
             </a:r>
             <a:endParaRPr lang="en-US" sz="1300" dirty="0"/>
           </a:p>
@@ -37734,7 +37800,7 @@
                 <a:ea typeface="Calibri" pitchFamily="34" charset="-122"/>
                 <a:cs typeface="Calibri" pitchFamily="34" charset="-120"/>
               </a:rPr>
-              <a:t>5.  The morpheme 'tele' means 'sound' in Greek.</a:t>
+              <a:t>5.  The morpheme 'tele' comes from Latin.</a:t>
             </a:r>
             <a:endParaRPr lang="en-US" sz="1300" dirty="0"/>
           </a:p>
@@ -38571,7 +38637,7 @@
                 <a:ea typeface="Trebuchet MS" pitchFamily="34" charset="-122"/>
                 <a:cs typeface="Trebuchet MS" pitchFamily="34" charset="-120"/>
               </a:rPr>
-              <a:t>telegraph</a:t>
+              <a:t>telegram</a:t>
             </a:r>
             <a:endParaRPr lang="en-US" sz="1300" dirty="0"/>
           </a:p>
@@ -38637,7 +38703,7 @@
                 <a:ea typeface="Trebuchet MS" pitchFamily="34" charset="-122"/>
                 <a:cs typeface="Trebuchet MS" pitchFamily="34" charset="-120"/>
               </a:rPr>
-              <a:t>teleport</a:t>
+              <a:t>telepathy</a:t>
             </a:r>
             <a:endParaRPr lang="en-US" sz="1300" dirty="0"/>
           </a:p>
@@ -38703,7 +38769,7 @@
                 <a:ea typeface="Trebuchet MS" pitchFamily="34" charset="-122"/>
                 <a:cs typeface="Trebuchet MS" pitchFamily="34" charset="-120"/>
               </a:rPr>
-              <a:t>telepathy</a:t>
+              <a:t>teleport</a:t>
             </a:r>
             <a:endParaRPr lang="en-US" sz="1300" dirty="0"/>
           </a:p>
@@ -39362,7 +39428,7 @@
                 <a:ea typeface="Trebuchet MS" pitchFamily="34" charset="-122"/>
                 <a:cs typeface="Trebuchet MS" pitchFamily="34" charset="-120"/>
               </a:rPr>
-              <a:t>micro-</a:t>
+              <a:t>auto-</a:t>
             </a:r>
             <a:endParaRPr lang="en-US" sz="1300" dirty="0"/>
           </a:p>
@@ -39554,7 +39620,7 @@
                 <a:ea typeface="Trebuchet MS" pitchFamily="34" charset="-122"/>
                 <a:cs typeface="Trebuchet MS" pitchFamily="34" charset="-120"/>
               </a:rPr>
-              <a:t>bio-</a:t>
+              <a:t>micro-</a:t>
             </a:r>
             <a:endParaRPr lang="en-US" sz="1300" dirty="0"/>
           </a:p>
@@ -39707,7 +39773,7 @@
                 <a:ea typeface="Trebuchet MS" pitchFamily="34" charset="-122"/>
                 <a:cs typeface="Trebuchet MS" pitchFamily="34" charset="-120"/>
               </a:rPr>
-              <a:t>geo-</a:t>
+              <a:t>photo-</a:t>
             </a:r>
             <a:endParaRPr lang="en-US" sz="1300" dirty="0"/>
           </a:p>
@@ -39796,7 +39862,7 @@
                 <a:ea typeface="Trebuchet MS" pitchFamily="34" charset="-122"/>
                 <a:cs typeface="Trebuchet MS" pitchFamily="34" charset="-120"/>
               </a:rPr>
-              <a:t>-vision</a:t>
+              <a:t>-graph</a:t>
             </a:r>
             <a:endParaRPr lang="en-US" sz="1300" dirty="0"/>
           </a:p>
@@ -39860,7 +39926,7 @@
                 <a:ea typeface="Trebuchet MS" pitchFamily="34" charset="-122"/>
                 <a:cs typeface="Trebuchet MS" pitchFamily="34" charset="-120"/>
               </a:rPr>
-              <a:t>astro-</a:t>
+              <a:t>cyber-</a:t>
             </a:r>
             <a:endParaRPr lang="en-US" sz="1300" dirty="0"/>
           </a:p>
@@ -39949,7 +40015,7 @@
                 <a:ea typeface="Trebuchet MS" pitchFamily="34" charset="-122"/>
                 <a:cs typeface="Trebuchet MS" pitchFamily="34" charset="-120"/>
               </a:rPr>
-              <a:t>-graph</a:t>
+              <a:t>-vision</a:t>
             </a:r>
             <a:endParaRPr lang="en-US" sz="1300" dirty="0"/>
           </a:p>
@@ -40013,7 +40079,7 @@
                 <a:ea typeface="Trebuchet MS" pitchFamily="34" charset="-122"/>
                 <a:cs typeface="Trebuchet MS" pitchFamily="34" charset="-120"/>
               </a:rPr>
-              <a:t>cyber-</a:t>
+              <a:t>mega-</a:t>
             </a:r>
             <a:endParaRPr lang="en-US" sz="1300" dirty="0"/>
           </a:p>
@@ -40156,7 +40222,7 @@
         <p:spPr>
           <a:xfrm>
             <a:off x="1508760" y="4178808"/>
-            <a:ext cx="1243584" cy="420624"/>
+            <a:ext cx="1097280" cy="420624"/>
           </a:xfrm>
           <a:prstGeom prst="rect">
             <a:avLst>
@@ -40190,7 +40256,7 @@
         <p:spPr>
           <a:xfrm>
             <a:off x="1508760" y="4178808"/>
-            <a:ext cx="1243584" cy="420624"/>
+            <a:ext cx="1097280" cy="420624"/>
           </a:xfrm>
           <a:prstGeom prst="rect">
             <a:avLst/>
@@ -40214,7 +40280,7 @@
                 <a:ea typeface="Trebuchet MS" pitchFamily="34" charset="-122"/>
                 <a:cs typeface="Trebuchet MS" pitchFamily="34" charset="-120"/>
               </a:rPr>
-              <a:t>micro-</a:t>
+              <a:t>auto-</a:t>
             </a:r>
             <a:endParaRPr lang="en-US" sz="1300" dirty="0"/>
           </a:p>
@@ -40228,7 +40294,7 @@
         </p:nvSpPr>
         <p:spPr>
           <a:xfrm>
-            <a:off x="2779776" y="4178808"/>
+            <a:off x="2633472" y="4178808"/>
             <a:ext cx="320040" cy="420624"/>
           </a:xfrm>
           <a:prstGeom prst="rect">
@@ -40267,7 +40333,7 @@
         </p:nvSpPr>
         <p:spPr>
           <a:xfrm>
-            <a:off x="3127248" y="4178808"/>
+            <a:off x="2980944" y="4178808"/>
             <a:ext cx="1243584" cy="420624"/>
           </a:xfrm>
           <a:prstGeom prst="rect">
@@ -40301,7 +40367,7 @@
         </p:nvSpPr>
         <p:spPr>
           <a:xfrm>
-            <a:off x="3127248" y="4178808"/>
+            <a:off x="2980944" y="4178808"/>
             <a:ext cx="1243584" cy="420624"/>
           </a:xfrm>
           <a:prstGeom prst="rect">
@@ -40340,7 +40406,7 @@
         </p:nvSpPr>
         <p:spPr>
           <a:xfrm>
-            <a:off x="4398264" y="4178808"/>
+            <a:off x="4251960" y="4178808"/>
             <a:ext cx="320040" cy="420624"/>
           </a:xfrm>
           <a:prstGeom prst="rect">
@@ -40379,7 +40445,7 @@
         </p:nvSpPr>
         <p:spPr>
           <a:xfrm>
-            <a:off x="4745736" y="4178808"/>
+            <a:off x="4599432" y="4178808"/>
             <a:ext cx="1243584" cy="420624"/>
           </a:xfrm>
           <a:prstGeom prst="rect">
@@ -40413,7 +40479,7 @@
         </p:nvSpPr>
         <p:spPr>
           <a:xfrm>
-            <a:off x="4745736" y="4178808"/>
+            <a:off x="4599432" y="4178808"/>
             <a:ext cx="1243584" cy="420624"/>
           </a:xfrm>
           <a:prstGeom prst="rect">
@@ -40452,7 +40518,7 @@
         </p:nvSpPr>
         <p:spPr>
           <a:xfrm>
-            <a:off x="6062472" y="4178808"/>
+            <a:off x="5916168" y="4178808"/>
             <a:ext cx="365760" cy="420624"/>
           </a:xfrm>
           <a:prstGeom prst="rect">
@@ -40491,7 +40557,7 @@
         </p:nvSpPr>
         <p:spPr>
           <a:xfrm>
-            <a:off x="6473952" y="4178808"/>
+            <a:off x="6327648" y="4178808"/>
             <a:ext cx="2194560" cy="420624"/>
           </a:xfrm>
           <a:prstGeom prst="rect">
@@ -40518,7 +40584,7 @@
         </p:nvSpPr>
         <p:spPr>
           <a:xfrm>
-            <a:off x="6473952" y="4178808"/>
+            <a:off x="6327648" y="4178808"/>
             <a:ext cx="2194560" cy="420624"/>
           </a:xfrm>
           <a:prstGeom prst="rect">
@@ -41013,7 +41079,7 @@
                 <a:ea typeface="Calibri" pitchFamily="34" charset="-122"/>
                 <a:cs typeface="Calibri" pitchFamily="34" charset="-120"/>
               </a:rPr>
-              <a:t>A device that lets you speak to someone who is far away.</a:t>
+              <a:t>A device that lets you talk to someone who is far away.</a:t>
             </a:r>
             <a:endParaRPr lang="en-US" sz="1200" dirty="0"/>
           </a:p>
@@ -41152,7 +41218,7 @@
                 <a:ea typeface="Calibri" pitchFamily="34" charset="-122"/>
                 <a:cs typeface="Calibri" pitchFamily="34" charset="-120"/>
               </a:rPr>
-              <a:t>A screen that shows moving pictures and sound sent from far away.</a:t>
+              <a:t>A screen that receives and shows moving pictures and sound from far away.</a:t>
             </a:r>
             <a:endParaRPr lang="en-US" sz="1200" dirty="0"/>
           </a:p>
@@ -41291,7 +41357,7 @@
                 <a:ea typeface="Calibri" pitchFamily="34" charset="-122"/>
                 <a:cs typeface="Calibri" pitchFamily="34" charset="-120"/>
               </a:rPr>
-              <a:t>The imagined ability to send thoughts directly to someone else's mind from far away.</a:t>
+              <a:t>To instantly move a person or object from one place to another far away, often in stories.</a:t>
             </a:r>
             <a:endParaRPr lang="en-US" sz="1200" dirty="0"/>
           </a:p>
@@ -41364,7 +41430,7 @@
                 <a:ea typeface="Trebuchet MS" pitchFamily="34" charset="-122"/>
                 <a:cs typeface="Trebuchet MS" pitchFamily="34" charset="-120"/>
               </a:rPr>
-              <a:t>telegraph</a:t>
+              <a:t>telegram</a:t>
             </a:r>
             <a:endParaRPr lang="en-US" sz="1200" dirty="0"/>
           </a:p>
@@ -41430,7 +41496,7 @@
                 <a:ea typeface="Calibri" pitchFamily="34" charset="-122"/>
                 <a:cs typeface="Calibri" pitchFamily="34" charset="-120"/>
               </a:rPr>
-              <a:t>An old machine that sent messages over long distances using electrical signals.</a:t>
+              <a:t>A short message sent quickly over long distances using electrical signals.</a:t>
             </a:r>
             <a:endParaRPr lang="en-US" sz="1200" dirty="0"/>
           </a:p>
@@ -41503,7 +41569,7 @@
                 <a:ea typeface="Trebuchet MS" pitchFamily="34" charset="-122"/>
                 <a:cs typeface="Trebuchet MS" pitchFamily="34" charset="-120"/>
               </a:rPr>
-              <a:t>teleport</a:t>
+              <a:t>telepathy</a:t>
             </a:r>
             <a:endParaRPr lang="en-US" sz="1200" dirty="0"/>
           </a:p>
@@ -41569,7 +41635,7 @@
                 <a:ea typeface="Calibri" pitchFamily="34" charset="-122"/>
                 <a:cs typeface="Calibri" pitchFamily="34" charset="-120"/>
               </a:rPr>
-              <a:t>To instantly move from one place to another very far away (often in science fiction).</a:t>
+              <a:t>The imagined ability to send thoughts directly to someone else's mind without speaking.</a:t>
             </a:r>
             <a:endParaRPr lang="en-US" sz="1200" dirty="0"/>
           </a:p>
@@ -41642,7 +41708,7 @@
                 <a:ea typeface="Trebuchet MS" pitchFamily="34" charset="-122"/>
                 <a:cs typeface="Trebuchet MS" pitchFamily="34" charset="-120"/>
               </a:rPr>
-              <a:t>telepathy</a:t>
+              <a:t>teleport</a:t>
             </a:r>
             <a:endParaRPr lang="en-US" sz="1200" dirty="0"/>
           </a:p>
@@ -41708,7 +41774,7 @@
                 <a:ea typeface="Calibri" pitchFamily="34" charset="-122"/>
                 <a:cs typeface="Calibri" pitchFamily="34" charset="-120"/>
               </a:rPr>
-              <a:t>A programme that is broadcast and sent to television screens far away.</a:t>
+              <a:t>A programme that is broadcast and sent out over television to viewers far away.</a:t>
             </a:r>
             <a:endParaRPr lang="en-US" sz="1200" dirty="0"/>
           </a:p>
@@ -41847,7 +41913,7 @@
                 <a:ea typeface="Calibri" pitchFamily="34" charset="-122"/>
                 <a:cs typeface="Calibri" pitchFamily="34" charset="-120"/>
               </a:rPr>
-              <a:t>A tube-shaped tool that makes faraway objects like stars look closer and bigger.</a:t>
+              <a:t>A tube-shaped tool that makes faraway things like stars look closer and bigger.</a:t>
             </a:r>
             <a:endParaRPr lang="en-US" sz="1200" dirty="0"/>
           </a:p>
@@ -42342,7 +42408,7 @@
                 <a:ea typeface="Calibri" pitchFamily="34" charset="-122"/>
                 <a:cs typeface="Calibri" pitchFamily="34" charset="-120"/>
               </a:rPr>
-              <a:t>We used a telescope to look at the craters on the moon during our science lesson.</a:t>
+              <a:t>We watched the rocket launch on television last night and it was absolutely amazing.</a:t>
             </a:r>
             <a:endParaRPr lang="en-US" sz="1500" dirty="0"/>
           </a:p>
@@ -42506,7 +42572,7 @@
                 <a:ea typeface="Calibri" pitchFamily="34" charset="-122"/>
                 <a:cs typeface="Calibri" pitchFamily="34" charset="-120"/>
               </a:rPr>
-              <a:t>Before mobile phones existed, people had to use a telephone attached to the wall to call their friends.</a:t>
+              <a:t>Mia used a telescope to look at the craters on the moon from her backyard.</a:t>
             </a:r>
             <a:endParaRPr lang="en-US" sz="1500" dirty="0"/>
           </a:p>
@@ -42670,7 +42736,7 @@
                 <a:ea typeface="Calibri" pitchFamily="34" charset="-122"/>
                 <a:cs typeface="Calibri" pitchFamily="34" charset="-120"/>
               </a:rPr>
-              <a:t>The astronauts sent telemetry data back to scientists on Earth so they could monitor the spacecraft.</a:t>
+              <a:t>Before mobile phones existed, people sent urgent messages using a telegraph or telegram.</a:t>
             </a:r>
             <a:endParaRPr lang="en-US" sz="1500" dirty="0"/>
           </a:p>
